--- a/data/outputs/v2/Biology/SS1.2_Chemicals_of_Life/quiz/Biology_G10_SS1.2_Chemicals_of_Life_L6_QuickCheck.pptx
+++ b/data/outputs/v2/Biology/SS1.2_Chemicals_of_Life/quiz/Biology_G10_SS1.2_Chemicals_of_Life_L6_QuickCheck.pptx
@@ -14,9 +14,10 @@
     <p:sldId id="262" r:id="rId8"/>
     <p:sldId id="263" r:id="rId9"/>
     <p:sldId id="264" r:id="rId10"/>
+    <p:sldId id="265" r:id="rId11"/>
   </p:sldIdLst>
   <p:notesMasterIdLst>
-    <p:notesMasterId r:id="rId11"/>
+    <p:notesMasterId r:id="rId12"/>
   </p:notesMasterIdLst>
   <p:sldSz cx="12192000" cy="6858000"/>
   <p:notesSz cx="6858000" cy="12192000"/>
@@ -534,6 +535,94 @@
             <a:fld id="{F7021451-1387-4CA6-816F-3879F97B5CBC}" type="slidenum">
               <a:rPr lang="en-US"/>
               <a:t>1</a:t>
+            </a:fld>
+            <a:endParaRPr lang="en-US"/>
+          </a:p>
+        </p:txBody>
+      </p:sp>
+    </p:spTree>
+    <p:extLst>
+      <p:ext uri="{BB962C8B-B14F-4D97-AF65-F5344CB8AC3E}">
+        <p14:creationId xmlns:p14="http://schemas.microsoft.com/office/powerpoint/2010/main" val="1024086991"/>
+      </p:ext>
+    </p:extLst>
+  </p:cSld>
+  <p:clrMapOvr>
+    <a:masterClrMapping/>
+  </p:clrMapOvr>
+</p:notes>
+</file>
+
+<file path=ppt/notesSlides/notesSlide10.xml><?xml version="1.0" encoding="utf-8"?>
+<p:notes xmlns:a="http://schemas.openxmlformats.org/drawingml/2006/main" xmlns:r="http://schemas.openxmlformats.org/officeDocument/2006/relationships" xmlns:p="http://schemas.openxmlformats.org/presentationml/2006/main">
+  <p:cSld>
+    <p:spTree>
+      <p:nvGrpSpPr>
+        <p:cNvPr id="1" name=""/>
+        <p:cNvGrpSpPr/>
+        <p:nvPr/>
+      </p:nvGrpSpPr>
+      <p:grpSpPr>
+        <a:xfrm>
+          <a:off x="0" y="0"/>
+          <a:ext cx="0" cy="0"/>
+          <a:chOff x="0" y="0"/>
+          <a:chExt cx="0" cy="0"/>
+        </a:xfrm>
+      </p:grpSpPr>
+      <p:sp>
+        <p:nvSpPr>
+          <p:cNvPr id="2" name="Slide Image Placeholder 1"/>
+          <p:cNvSpPr>
+            <a:spLocks noGrp="1" noRot="1" noChangeAspect="1"/>
+          </p:cNvSpPr>
+          <p:nvPr>
+            <p:ph type="sldImg"/>
+          </p:nvPr>
+        </p:nvSpPr>
+        <p:spPr/>
+      </p:sp>
+      <p:sp>
+        <p:nvSpPr>
+          <p:cNvPr id="3" name="Notes Placeholder 2"/>
+          <p:cNvSpPr>
+            <a:spLocks noGrp="1"/>
+          </p:cNvSpPr>
+          <p:nvPr>
+            <p:ph type="body" idx="1"/>
+          </p:nvPr>
+        </p:nvSpPr>
+        <p:spPr/>
+        <p:txBody>
+          <a:bodyPr/>
+          <a:lstStyle/>
+          <a:p>
+            <a:r>
+              <a:rPr lang="en-US" dirty="0"/>
+              <a:t/>
+            </a:r>
+            <a:endParaRPr lang="en-US" dirty="0"/>
+          </a:p>
+        </p:txBody>
+      </p:sp>
+      <p:sp>
+        <p:nvSpPr>
+          <p:cNvPr id="4" name="Slide Number Placeholder 3"/>
+          <p:cNvSpPr>
+            <a:spLocks noGrp="1"/>
+          </p:cNvSpPr>
+          <p:nvPr>
+            <p:ph type="sldNum" sz="quarter" idx="10"/>
+          </p:nvPr>
+        </p:nvSpPr>
+        <p:spPr/>
+        <p:txBody>
+          <a:bodyPr/>
+          <a:lstStyle/>
+          <a:p>
+            <a:fld id="{F7021451-1387-4CA6-816F-3879F97B5CBC}" type="slidenum">
+              <a:rPr lang="en-US"/>
+              <a:t>10</a:t>
             </a:fld>
             <a:endParaRPr lang="en-US"/>
           </a:p>
@@ -1690,7 +1779,7 @@
               <a:buNone/>
             </a:pPr>
             <a:r>
-              <a:rPr lang="en-US" sz="1600" dirty="0">
+              <a:rPr lang="en-US" sz="2000" dirty="0">
                 <a:solidFill>
                   <a:srgbClr val="D9EEF1"/>
                 </a:solidFill>
@@ -1698,9 +1787,9 @@
                 <a:ea typeface="Arial" pitchFamily="34" charset="-122"/>
                 <a:cs typeface="Arial" pitchFamily="34" charset="-120"/>
               </a:rPr>
-              <a:t>Lesson 6: Building Our Chemicals of Life Model: Consolidating the Science Behind Two Children in Kisumu</a:t>
-            </a:r>
-            <a:endParaRPr lang="en-US" sz="1600" dirty="0"/>
+              <a:t>Lesson 6: Absorption, Respiration and Regulation: Explaining the Fall Back to 4.5 mmol/L</a:t>
+            </a:r>
+            <a:endParaRPr lang="en-US" sz="2000" dirty="0"/>
           </a:p>
         </p:txBody>
       </p:sp>
@@ -1737,7 +1826,7 @@
                 <a:ea typeface="Arial" pitchFamily="34" charset="-122"/>
                 <a:cs typeface="Arial" pitchFamily="34" charset="-120"/>
               </a:rPr>
-              <a:t>7 multiple-choice questions  •  choose A, B, C or D</a:t>
+              <a:t>8 multiple-choice questions  •  choose A, B, C or D</a:t>
             </a:r>
             <a:endParaRPr lang="en-US" sz="1600" dirty="0"/>
           </a:p>
@@ -1853,6 +1942,116 @@
               <a:t> (https://creativecommons.org/licenses/by-nc/4.0/).</a:t>
             </a:r>
             <a:endParaRPr lang="en-US" sz="900" dirty="0"/>
+          </a:p>
+        </p:txBody>
+      </p:sp>
+    </p:spTree>
+  </p:cSld>
+  <p:clrMapOvr>
+    <a:masterClrMapping/>
+  </p:clrMapOvr>
+</p:sld>
+</file>
+
+<file path=ppt/slides/slide10.xml><?xml version="1.0" encoding="utf-8"?>
+<p:sld xmlns:a="http://schemas.openxmlformats.org/drawingml/2006/main" xmlns:r="http://schemas.openxmlformats.org/officeDocument/2006/relationships" xmlns:p="http://schemas.openxmlformats.org/presentationml/2006/main">
+  <p:cSld name="Slide 10">
+    <p:bg>
+      <p:bgPr>
+        <a:solidFill>
+          <a:srgbClr val="1F3864"/>
+        </a:solidFill>
+      </p:bgPr>
+    </p:bg>
+    <p:spTree>
+      <p:nvGrpSpPr>
+        <p:cNvPr id="1" name=""/>
+        <p:cNvGrpSpPr/>
+        <p:nvPr/>
+      </p:nvGrpSpPr>
+      <p:grpSpPr>
+        <a:xfrm>
+          <a:off x="0" y="0"/>
+          <a:ext cx="0" cy="0"/>
+          <a:chOff x="0" y="0"/>
+          <a:chExt cx="0" cy="0"/>
+        </a:xfrm>
+      </p:grpSpPr>
+      <p:sp>
+        <p:nvSpPr>
+          <p:cNvPr id="2" name="Text 0"/>
+          <p:cNvSpPr/>
+          <p:nvPr/>
+        </p:nvSpPr>
+        <p:spPr>
+          <a:xfrm>
+            <a:off x="731520" y="2194560"/>
+            <a:ext cx="10698480" cy="822960"/>
+          </a:xfrm>
+          <a:prstGeom prst="rect">
+            <a:avLst/>
+          </a:prstGeom>
+          <a:noFill/>
+          <a:ln/>
+        </p:spPr>
+        <p:txBody>
+          <a:bodyPr wrap="square" lIns="0" tIns="0" rIns="0" bIns="0" rtlCol="0" anchor="ctr"/>
+          <a:lstStyle/>
+          <a:p>
+            <a:pPr indent="0" marL="0">
+              <a:buNone/>
+            </a:pPr>
+            <a:r>
+              <a:rPr lang="en-US" sz="3400" b="1" dirty="0">
+                <a:solidFill>
+                  <a:srgbClr val="FFFFFF"/>
+                </a:solidFill>
+                <a:latin typeface="Arial" pitchFamily="34" charset="0"/>
+                <a:ea typeface="Arial" pitchFamily="34" charset="-122"/>
+                <a:cs typeface="Arial" pitchFamily="34" charset="-120"/>
+              </a:rPr>
+              <a:t>All done</a:t>
+            </a:r>
+            <a:endParaRPr lang="en-US" sz="3400" dirty="0"/>
+          </a:p>
+        </p:txBody>
+      </p:sp>
+      <p:sp>
+        <p:nvSpPr>
+          <p:cNvPr id="3" name="Text 1"/>
+          <p:cNvSpPr/>
+          <p:nvPr/>
+        </p:nvSpPr>
+        <p:spPr>
+          <a:xfrm>
+            <a:off x="731520" y="3108960"/>
+            <a:ext cx="10698480" cy="731520"/>
+          </a:xfrm>
+          <a:prstGeom prst="rect">
+            <a:avLst/>
+          </a:prstGeom>
+          <a:noFill/>
+          <a:ln/>
+        </p:spPr>
+        <p:txBody>
+          <a:bodyPr wrap="square" lIns="0" tIns="0" rIns="0" bIns="0" rtlCol="0" anchor="ctr"/>
+          <a:lstStyle/>
+          <a:p>
+            <a:pPr indent="0" marL="0">
+              <a:buNone/>
+            </a:pPr>
+            <a:r>
+              <a:rPr lang="en-US" sz="1800" dirty="0">
+                <a:solidFill>
+                  <a:srgbClr val="D9EEF1"/>
+                </a:solidFill>
+                <a:latin typeface="Arial" pitchFamily="34" charset="0"/>
+                <a:ea typeface="Arial" pitchFamily="34" charset="-122"/>
+                <a:cs typeface="Arial" pitchFamily="34" charset="-120"/>
+              </a:rPr>
+              <a:t>Ask your teacher how to submit your answers today (for example, on a paper answer slip).</a:t>
+            </a:r>
+            <a:endParaRPr lang="en-US" sz="1800" dirty="0"/>
           </a:p>
         </p:txBody>
       </p:sp>
@@ -1921,7 +2120,7 @@
                 <a:ea typeface="Arial" pitchFamily="34" charset="-122"/>
                 <a:cs typeface="Arial" pitchFamily="34" charset="-120"/>
               </a:rPr>
-              <a:t>QUESTION 1 OF 7</a:t>
+              <a:t>QUESTION 1 OF 8</a:t>
             </a:r>
             <a:endParaRPr lang="en-US" sz="1300" dirty="0"/>
           </a:p>
@@ -2021,7 +2220,7 @@
                 <a:ea typeface="Arial" pitchFamily="34" charset="-122"/>
                 <a:cs typeface="Arial" pitchFamily="34" charset="-120"/>
               </a:rPr>
-              <a:t>At the start of the unit, a group wrote: "Food is just energy, so two children eating the same amount should be equally healthy." Which updated statement shows the best evidence-based change in thinking?</a:t>
+              <a:t>Wanjiru's blood glucose reached a peak of 8.0 mmol/L at 60 minutes after her meal of ugali, sukuma wiki and beans. Suppose nothing removed glucose from her blood after that time. What would her blood glucose concentration do?</a:t>
             </a:r>
             <a:endParaRPr lang="en-US" sz="1800" dirty="0"/>
           </a:p>
@@ -2113,17 +2312,17 @@
               <a:buNone/>
             </a:pPr>
             <a:r>
-              <a:rPr lang="en-US" sz="1300" dirty="0">
-                <a:solidFill>
-                  <a:srgbClr val="FFFFFF"/>
-                </a:solidFill>
-                <a:latin typeface="Arial" pitchFamily="34" charset="0"/>
-                <a:ea typeface="Arial" pitchFamily="34" charset="-122"/>
-                <a:cs typeface="Arial" pitchFamily="34" charset="-120"/>
-              </a:rPr>
-              <a:t>Only carbohydrates matter, because they give the body glucose.</a:t>
-            </a:r>
-            <a:endParaRPr lang="en-US" sz="1300" dirty="0"/>
+              <a:rPr lang="en-US" sz="1700" dirty="0">
+                <a:solidFill>
+                  <a:srgbClr val="FFFFFF"/>
+                </a:solidFill>
+                <a:latin typeface="Arial" pitchFamily="34" charset="0"/>
+                <a:ea typeface="Arial" pitchFamily="34" charset="-122"/>
+                <a:cs typeface="Arial" pitchFamily="34" charset="-120"/>
+              </a:rPr>
+              <a:t>It would keep rising without limit because glucose is made in the blood</a:t>
+            </a:r>
+            <a:endParaRPr lang="en-US" sz="1700" dirty="0"/>
           </a:p>
         </p:txBody>
       </p:sp>
@@ -2213,17 +2412,17 @@
               <a:buNone/>
             </a:pPr>
             <a:r>
-              <a:rPr lang="en-US" sz="1300" dirty="0">
-                <a:solidFill>
-                  <a:srgbClr val="FFFFFF"/>
-                </a:solidFill>
-                <a:latin typeface="Arial" pitchFamily="34" charset="0"/>
-                <a:ea typeface="Arial" pitchFamily="34" charset="-122"/>
-                <a:cs typeface="Arial" pitchFamily="34" charset="-120"/>
-              </a:rPr>
-              <a:t>Food is made of six chemicals of life with different structures and functions, and missing one can cause a specific disease.</a:t>
-            </a:r>
-            <a:endParaRPr lang="en-US" sz="1300" dirty="0"/>
+              <a:rPr lang="en-US" sz="1700" dirty="0">
+                <a:solidFill>
+                  <a:srgbClr val="FFFFFF"/>
+                </a:solidFill>
+                <a:latin typeface="Arial" pitchFamily="34" charset="0"/>
+                <a:ea typeface="Arial" pitchFamily="34" charset="-122"/>
+                <a:cs typeface="Arial" pitchFamily="34" charset="-120"/>
+              </a:rPr>
+              <a:t>It would stay high, close to 8.0 mmol/L, because nothing is taking glucose out</a:t>
+            </a:r>
+            <a:endParaRPr lang="en-US" sz="1700" dirty="0"/>
           </a:p>
         </p:txBody>
       </p:sp>
@@ -2313,17 +2512,17 @@
               <a:buNone/>
             </a:pPr>
             <a:r>
-              <a:rPr lang="en-US" sz="1300" dirty="0">
-                <a:solidFill>
-                  <a:srgbClr val="FFFFFF"/>
-                </a:solidFill>
-                <a:latin typeface="Arial" pitchFamily="34" charset="0"/>
-                <a:ea typeface="Arial" pitchFamily="34" charset="-122"/>
-                <a:cs typeface="Arial" pitchFamily="34" charset="-120"/>
-              </a:rPr>
-              <a:t>Food is mainly energy, but children who eat more of it become healthier.</a:t>
-            </a:r>
-            <a:endParaRPr lang="en-US" sz="1300" dirty="0"/>
+              <a:rPr lang="en-US" sz="1700" dirty="0">
+                <a:solidFill>
+                  <a:srgbClr val="FFFFFF"/>
+                </a:solidFill>
+                <a:latin typeface="Arial" pitchFamily="34" charset="0"/>
+                <a:ea typeface="Arial" pitchFamily="34" charset="-122"/>
+                <a:cs typeface="Arial" pitchFamily="34" charset="-120"/>
+              </a:rPr>
+              <a:t>It would fall back to 4.5 mmol/L anyway because glucose slowly disappears</a:t>
+            </a:r>
+            <a:endParaRPr lang="en-US" sz="1700" dirty="0"/>
           </a:p>
         </p:txBody>
       </p:sp>
@@ -2413,17 +2612,17 @@
               <a:buNone/>
             </a:pPr>
             <a:r>
-              <a:rPr lang="en-US" sz="1300" dirty="0">
-                <a:solidFill>
-                  <a:srgbClr val="FFFFFF"/>
-                </a:solidFill>
-                <a:latin typeface="Arial" pitchFamily="34" charset="0"/>
-                <a:ea typeface="Arial" pitchFamily="34" charset="-122"/>
-                <a:cs typeface="Arial" pitchFamily="34" charset="-120"/>
-              </a:rPr>
-              <a:t>Food with more water in it is healthier because water is a chemical of life.</a:t>
-            </a:r>
-            <a:endParaRPr lang="en-US" sz="1300" dirty="0"/>
+              <a:rPr lang="en-US" sz="1700" dirty="0">
+                <a:solidFill>
+                  <a:srgbClr val="FFFFFF"/>
+                </a:solidFill>
+                <a:latin typeface="Arial" pitchFamily="34" charset="0"/>
+                <a:ea typeface="Arial" pitchFamily="34" charset="-122"/>
+                <a:cs typeface="Arial" pitchFamily="34" charset="-120"/>
+              </a:rPr>
+              <a:t>It would fall because glucose is lost in sweat and urine</a:t>
+            </a:r>
+            <a:endParaRPr lang="en-US" sz="1700" dirty="0"/>
           </a:p>
         </p:txBody>
       </p:sp>
@@ -2531,7 +2730,7 @@
                 <a:ea typeface="Arial" pitchFamily="34" charset="-122"/>
                 <a:cs typeface="Arial" pitchFamily="34" charset="-120"/>
               </a:rPr>
-              <a:t>QUESTION 2 OF 7</a:t>
+              <a:t>QUESTION 2 OF 8</a:t>
             </a:r>
             <a:endParaRPr lang="en-US" sz="1300" dirty="0"/>
           </a:p>
@@ -2623,17 +2822,17 @@
               <a:buNone/>
             </a:pPr>
             <a:r>
-              <a:rPr lang="en-US" sz="1800" b="1" dirty="0">
-                <a:solidFill>
-                  <a:srgbClr val="FFFFFF"/>
-                </a:solidFill>
-                <a:latin typeface="Arial" pitchFamily="34" charset="0"/>
-                <a:ea typeface="Arial" pitchFamily="34" charset="-122"/>
-                <a:cs typeface="Arial" pitchFamily="34" charset="-120"/>
-              </a:rPr>
-              <a:t>On a group poster about two children in Kisumu, one child eats only ugali (maize starch) every day and the other eats githeri (maize and beans). Which arrow label correctly links the ugali child to the chemicals of life?</a:t>
-            </a:r>
-            <a:endParaRPr lang="en-US" sz="1800" dirty="0"/>
+              <a:rPr lang="en-US" sz="2000" b="1" dirty="0">
+                <a:solidFill>
+                  <a:srgbClr val="FFFFFF"/>
+                </a:solidFill>
+                <a:latin typeface="Arial" pitchFamily="34" charset="0"/>
+                <a:ea typeface="Arial" pitchFamily="34" charset="-122"/>
+                <a:cs typeface="Arial" pitchFamily="34" charset="-120"/>
+              </a:rPr>
+              <a:t>Wanjiru's blood glucose was 8.0 mmol/L at 60 minutes and 6.5 mmol/L at 90 minutes. By how much did it fall in this 30-minute interval?</a:t>
+            </a:r>
+            <a:endParaRPr lang="en-US" sz="2000" dirty="0"/>
           </a:p>
         </p:txBody>
       </p:sp>
@@ -2731,7 +2930,7 @@
                 <a:ea typeface="Arial" pitchFamily="34" charset="-122"/>
                 <a:cs typeface="Arial" pitchFamily="34" charset="-120"/>
               </a:rPr>
-              <a:t>Excess protein and too little carbohydrate</a:t>
+              <a:t>3.5 mmol/L</a:t>
             </a:r>
             <a:endParaRPr lang="en-US" sz="1700" dirty="0"/>
           </a:p>
@@ -2831,7 +3030,7 @@
                 <a:ea typeface="Arial" pitchFamily="34" charset="-122"/>
                 <a:cs typeface="Arial" pitchFamily="34" charset="-120"/>
               </a:rPr>
-              <a:t>Plenty of carbohydrate but too little protein</a:t>
+              <a:t>1.5 mmol/L</a:t>
             </a:r>
             <a:endParaRPr lang="en-US" sz="1700" dirty="0"/>
           </a:p>
@@ -2931,7 +3130,7 @@
                 <a:ea typeface="Arial" pitchFamily="34" charset="-122"/>
                 <a:cs typeface="Arial" pitchFamily="34" charset="-120"/>
               </a:rPr>
-              <a:t>No carbohydrate at all, so no energy</a:t>
+              <a:t>0.5 mmol/L</a:t>
             </a:r>
             <a:endParaRPr lang="en-US" sz="1700" dirty="0"/>
           </a:p>
@@ -3031,7 +3230,7 @@
                 <a:ea typeface="Arial" pitchFamily="34" charset="-122"/>
                 <a:cs typeface="Arial" pitchFamily="34" charset="-120"/>
               </a:rPr>
-              <a:t>Balanced intake of all six chemicals</a:t>
+              <a:t>14.5 mmol/L</a:t>
             </a:r>
             <a:endParaRPr lang="en-US" sz="1700" dirty="0"/>
           </a:p>
@@ -3141,7 +3340,7 @@
                 <a:ea typeface="Arial" pitchFamily="34" charset="-122"/>
                 <a:cs typeface="Arial" pitchFamily="34" charset="-120"/>
               </a:rPr>
-              <a:t>QUESTION 3 OF 7</a:t>
+              <a:t>QUESTION 3 OF 8</a:t>
             </a:r>
             <a:endParaRPr lang="en-US" sz="1300" dirty="0"/>
           </a:p>
@@ -3233,17 +3432,17 @@
               <a:buNone/>
             </a:pPr>
             <a:r>
-              <a:rPr lang="en-US" sz="2000" b="1" dirty="0">
-                <a:solidFill>
-                  <a:srgbClr val="FFFFFF"/>
-                </a:solidFill>
-                <a:latin typeface="Arial" pitchFamily="34" charset="0"/>
-                <a:ea typeface="Arial" pitchFamily="34" charset="-122"/>
-                <a:cs typeface="Arial" pitchFamily="34" charset="-120"/>
-              </a:rPr>
-              <a:t>A learner crushes avocado, shakes it with ethanol, then pours the liquid into water. A cloudy white layer forms. What does this ethanol emulsion result show?</a:t>
-            </a:r>
-            <a:endParaRPr lang="en-US" sz="2000" dirty="0"/>
+              <a:rPr lang="en-US" sz="1800" b="1" dirty="0">
+                <a:solidFill>
+                  <a:srgbClr val="FFFFFF"/>
+                </a:solidFill>
+                <a:latin typeface="Arial" pitchFamily="34" charset="0"/>
+                <a:ea typeface="Arial" pitchFamily="34" charset="-122"/>
+                <a:cs typeface="Arial" pitchFamily="34" charset="-120"/>
+              </a:rPr>
+              <a:t>Wanjiru's blood glucose rose by 3.5 mmol/L in the first 60 minutes (4.5 to 8.0). It then fell by 3.5 mmol/L from 60 to 180 minutes (8.0 to 4.5). How many times longer did the fall take than the rise?</a:t>
+            </a:r>
+            <a:endParaRPr lang="en-US" sz="1800" dirty="0"/>
           </a:p>
         </p:txBody>
       </p:sp>
@@ -3341,7 +3540,7 @@
                 <a:ea typeface="Arial" pitchFamily="34" charset="-122"/>
                 <a:cs typeface="Arial" pitchFamily="34" charset="-120"/>
               </a:rPr>
-              <a:t>Starch is present</a:t>
+              <a:t>3.5 times as long</a:t>
             </a:r>
             <a:endParaRPr lang="en-US" sz="1700" dirty="0"/>
           </a:p>
@@ -3441,7 +3640,7 @@
                 <a:ea typeface="Arial" pitchFamily="34" charset="-122"/>
                 <a:cs typeface="Arial" pitchFamily="34" charset="-120"/>
               </a:rPr>
-              <a:t>Glucose is present</a:t>
+              <a:t>2 times as long</a:t>
             </a:r>
             <a:endParaRPr lang="en-US" sz="1700" dirty="0"/>
           </a:p>
@@ -3541,7 +3740,7 @@
                 <a:ea typeface="Arial" pitchFamily="34" charset="-122"/>
                 <a:cs typeface="Arial" pitchFamily="34" charset="-120"/>
               </a:rPr>
-              <a:t>Lipids (fats and oils) are present</a:t>
+              <a:t>The same time, because both changes are 3.5 mmol/L</a:t>
             </a:r>
             <a:endParaRPr lang="en-US" sz="1700" dirty="0"/>
           </a:p>
@@ -3641,7 +3840,7 @@
                 <a:ea typeface="Arial" pitchFamily="34" charset="-122"/>
                 <a:cs typeface="Arial" pitchFamily="34" charset="-120"/>
               </a:rPr>
-              <a:t>Proteins are present</a:t>
+              <a:t>Half as long, because the body removes glucose quickly</a:t>
             </a:r>
             <a:endParaRPr lang="en-US" sz="1700" dirty="0"/>
           </a:p>
@@ -3751,7 +3950,7 @@
                 <a:ea typeface="Arial" pitchFamily="34" charset="-122"/>
                 <a:cs typeface="Arial" pitchFamily="34" charset="-120"/>
               </a:rPr>
-              <a:t>QUESTION 4 OF 7</a:t>
+              <a:t>QUESTION 4 OF 8</a:t>
             </a:r>
             <a:endParaRPr lang="en-US" sz="1300" dirty="0"/>
           </a:p>
@@ -3812,7 +4011,7 @@
                 <a:ea typeface="Arial" pitchFamily="34" charset="-122"/>
                 <a:cs typeface="Arial" pitchFamily="34" charset="-120"/>
               </a:rPr>
-              <a:t>Use after: Explain phase</a:t>
+              <a:t>Use after: Observe phase</a:t>
             </a:r>
             <a:endParaRPr lang="en-US" sz="1100" dirty="0"/>
           </a:p>
@@ -3843,17 +4042,17 @@
               <a:buNone/>
             </a:pPr>
             <a:r>
-              <a:rPr lang="en-US" sz="2300" b="1" dirty="0">
-                <a:solidFill>
-                  <a:srgbClr val="FFFFFF"/>
-                </a:solidFill>
-                <a:latin typeface="Arial" pitchFamily="34" charset="0"/>
-                <a:ea typeface="Arial" pitchFamily="34" charset="-122"/>
-                <a:cs typeface="Arial" pitchFamily="34" charset="-120"/>
-              </a:rPr>
-              <a:t>A child eating only ugali develops a swollen belly (oedema). Which explanation is scientifically correct?</a:t>
-            </a:r>
-            <a:endParaRPr lang="en-US" sz="2300" dirty="0"/>
+              <a:rPr lang="en-US" sz="2000" b="1" dirty="0">
+                <a:solidFill>
+                  <a:srgbClr val="FFFFFF"/>
+                </a:solidFill>
+                <a:latin typeface="Arial" pitchFamily="34" charset="0"/>
+                <a:ea typeface="Arial" pitchFamily="34" charset="-122"/>
+                <a:cs typeface="Arial" pitchFamily="34" charset="-120"/>
+              </a:rPr>
+              <a:t>In the role-play of glucose after a meal, a learner holds up insulin cards when the blood glucose is high. Which statement correctly describes insulin?</a:t>
+            </a:r>
+            <a:endParaRPr lang="en-US" sz="2000" dirty="0"/>
           </a:p>
         </p:txBody>
       </p:sp>
@@ -3951,7 +4150,7 @@
                 <a:ea typeface="Arial" pitchFamily="34" charset="-122"/>
                 <a:cs typeface="Arial" pitchFamily="34" charset="-120"/>
               </a:rPr>
-              <a:t>The body has no keratin, so the belly cannot hold its shape.</a:t>
+              <a:t>The pancreas releases insulin, and it causes cells, the liver and muscles to take up glucose from the blood</a:t>
             </a:r>
             <a:endParaRPr lang="en-US" sz="1500" dirty="0"/>
           </a:p>
@@ -4051,7 +4250,7 @@
                 <a:ea typeface="Arial" pitchFamily="34" charset="-122"/>
                 <a:cs typeface="Arial" pitchFamily="34" charset="-120"/>
               </a:rPr>
-              <a:t>The child has no DNA to carry the genetic code.</a:t>
+              <a:t>The small intestine releases insulin, and it moves glucose into the blood</a:t>
             </a:r>
             <a:endParaRPr lang="en-US" sz="1500" dirty="0"/>
           </a:p>
@@ -4151,7 +4350,7 @@
                 <a:ea typeface="Arial" pitchFamily="34" charset="-122"/>
                 <a:cs typeface="Arial" pitchFamily="34" charset="-120"/>
               </a:rPr>
-              <a:t>The body cannot make enough albumin, a protein, because too few amino acids come from food.</a:t>
+              <a:t>Insulin is a food that gives the body energy when we eat</a:t>
             </a:r>
             <a:endParaRPr lang="en-US" sz="1500" dirty="0"/>
           </a:p>
@@ -4251,7 +4450,7 @@
                 <a:ea typeface="Arial" pitchFamily="34" charset="-122"/>
                 <a:cs typeface="Arial" pitchFamily="34" charset="-120"/>
               </a:rPr>
-              <a:t>Too much starch is stored in the belly as fat.</a:t>
+              <a:t>The liver releases insulin, and it digests starch into glucose</a:t>
             </a:r>
             <a:endParaRPr lang="en-US" sz="1500" dirty="0"/>
           </a:p>
@@ -4361,7 +4560,7 @@
                 <a:ea typeface="Arial" pitchFamily="34" charset="-122"/>
                 <a:cs typeface="Arial" pitchFamily="34" charset="-120"/>
               </a:rPr>
-              <a:t>QUESTION 5 OF 7</a:t>
+              <a:t>QUESTION 5 OF 8</a:t>
             </a:r>
             <a:endParaRPr lang="en-US" sz="1300" dirty="0"/>
           </a:p>
@@ -4422,7 +4621,7 @@
                 <a:ea typeface="Arial" pitchFamily="34" charset="-122"/>
                 <a:cs typeface="Arial" pitchFamily="34" charset="-120"/>
               </a:rPr>
-              <a:t>Use after: Explain phase</a:t>
+              <a:t>Use after: Observe phase</a:t>
             </a:r>
             <a:endParaRPr lang="en-US" sz="1100" dirty="0"/>
           </a:p>
@@ -4461,7 +4660,7 @@
                 <a:ea typeface="Arial" pitchFamily="34" charset="-122"/>
                 <a:cs typeface="Arial" pitchFamily="34" charset="-120"/>
               </a:rPr>
-              <a:t>A child in Kisumu eats githeri (maize and beans) regularly and stays healthy. What is the best chemical explanation?</a:t>
+              <a:t>Inside body cells, glucose is used in respiration to release energy. Which equation correctly shows respiration?</a:t>
             </a:r>
             <a:endParaRPr lang="en-US" sz="2300" dirty="0"/>
           </a:p>
@@ -4553,17 +4752,17 @@
               <a:buNone/>
             </a:pPr>
             <a:r>
-              <a:rPr lang="en-US" sz="1300" dirty="0">
-                <a:solidFill>
-                  <a:srgbClr val="FFFFFF"/>
-                </a:solidFill>
-                <a:latin typeface="Arial" pitchFamily="34" charset="0"/>
-                <a:ea typeface="Arial" pitchFamily="34" charset="-122"/>
-                <a:cs typeface="Arial" pitchFamily="34" charset="-120"/>
-              </a:rPr>
-              <a:t>Beans contain more starch, giving the child more energy than ugali does.</a:t>
-            </a:r>
-            <a:endParaRPr lang="en-US" sz="1300" dirty="0"/>
+              <a:rPr lang="en-US" sz="1700" dirty="0">
+                <a:solidFill>
+                  <a:srgbClr val="FFFFFF"/>
+                </a:solidFill>
+                <a:latin typeface="Arial" pitchFamily="34" charset="0"/>
+                <a:ea typeface="Arial" pitchFamily="34" charset="-122"/>
+                <a:cs typeface="Arial" pitchFamily="34" charset="-120"/>
+              </a:rPr>
+              <a:t>Glucose + water gives starch + oxygen + energy</a:t>
+            </a:r>
+            <a:endParaRPr lang="en-US" sz="1700" dirty="0"/>
           </a:p>
         </p:txBody>
       </p:sp>
@@ -4653,17 +4852,17 @@
               <a:buNone/>
             </a:pPr>
             <a:r>
-              <a:rPr lang="en-US" sz="1300" dirty="0">
-                <a:solidFill>
-                  <a:srgbClr val="FFFFFF"/>
-                </a:solidFill>
-                <a:latin typeface="Arial" pitchFamily="34" charset="0"/>
-                <a:ea typeface="Arial" pitchFamily="34" charset="-122"/>
-                <a:cs typeface="Arial" pitchFamily="34" charset="-120"/>
-              </a:rPr>
-              <a:t>Maize in githeri contains protein instead of starch.</a:t>
-            </a:r>
-            <a:endParaRPr lang="en-US" sz="1300" dirty="0"/>
+              <a:rPr lang="en-US" sz="1700" dirty="0">
+                <a:solidFill>
+                  <a:srgbClr val="FFFFFF"/>
+                </a:solidFill>
+                <a:latin typeface="Arial" pitchFamily="34" charset="0"/>
+                <a:ea typeface="Arial" pitchFamily="34" charset="-122"/>
+                <a:cs typeface="Arial" pitchFamily="34" charset="-120"/>
+              </a:rPr>
+              <a:t>Glucose + carbon dioxide gives oxygen + water + energy</a:t>
+            </a:r>
+            <a:endParaRPr lang="en-US" sz="1700" dirty="0"/>
           </a:p>
         </p:txBody>
       </p:sp>
@@ -4753,17 +4952,17 @@
               <a:buNone/>
             </a:pPr>
             <a:r>
-              <a:rPr lang="en-US" sz="1300" dirty="0">
-                <a:solidFill>
-                  <a:srgbClr val="FFFFFF"/>
-                </a:solidFill>
-                <a:latin typeface="Arial" pitchFamily="34" charset="0"/>
-                <a:ea typeface="Arial" pitchFamily="34" charset="-122"/>
-                <a:cs typeface="Arial" pitchFamily="34" charset="-120"/>
-              </a:rPr>
-              <a:t>Githeri contains more water than ugali, so the child stays hydrated.</a:t>
-            </a:r>
-            <a:endParaRPr lang="en-US" sz="1300" dirty="0"/>
+              <a:rPr lang="en-US" sz="1700" dirty="0">
+                <a:solidFill>
+                  <a:srgbClr val="FFFFFF"/>
+                </a:solidFill>
+                <a:latin typeface="Arial" pitchFamily="34" charset="0"/>
+                <a:ea typeface="Arial" pitchFamily="34" charset="-122"/>
+                <a:cs typeface="Arial" pitchFamily="34" charset="-120"/>
+              </a:rPr>
+              <a:t>Glucose + oxygen gives carbon dioxide + water + energy</a:t>
+            </a:r>
+            <a:endParaRPr lang="en-US" sz="1700" dirty="0"/>
           </a:p>
         </p:txBody>
       </p:sp>
@@ -4853,17 +5052,17 @@
               <a:buNone/>
             </a:pPr>
             <a:r>
-              <a:rPr lang="en-US" sz="1300" dirty="0">
-                <a:solidFill>
-                  <a:srgbClr val="FFFFFF"/>
-                </a:solidFill>
-                <a:latin typeface="Arial" pitchFamily="34" charset="0"/>
-                <a:ea typeface="Arial" pitchFamily="34" charset="-122"/>
-                <a:cs typeface="Arial" pitchFamily="34" charset="-120"/>
-              </a:rPr>
-              <a:t>Maize supplies carbohydrate and beans supply protein, providing the amino acids the body needs for protein synthesis.</a:t>
-            </a:r>
-            <a:endParaRPr lang="en-US" sz="1300" dirty="0"/>
+              <a:rPr lang="en-US" sz="1700" dirty="0">
+                <a:solidFill>
+                  <a:srgbClr val="FFFFFF"/>
+                </a:solidFill>
+                <a:latin typeface="Arial" pitchFamily="34" charset="0"/>
+                <a:ea typeface="Arial" pitchFamily="34" charset="-122"/>
+                <a:cs typeface="Arial" pitchFamily="34" charset="-120"/>
+              </a:rPr>
+              <a:t>Glucose + oxygen gives glycogen + carbon dioxide + energy</a:t>
+            </a:r>
+            <a:endParaRPr lang="en-US" sz="1700" dirty="0"/>
           </a:p>
         </p:txBody>
       </p:sp>
@@ -4971,7 +5170,7 @@
                 <a:ea typeface="Arial" pitchFamily="34" charset="-122"/>
                 <a:cs typeface="Arial" pitchFamily="34" charset="-120"/>
               </a:rPr>
-              <a:t>QUESTION 6 OF 7</a:t>
+              <a:t>QUESTION 6 OF 8</a:t>
             </a:r>
             <a:endParaRPr lang="en-US" sz="1300" dirty="0"/>
           </a:p>
@@ -5032,7 +5231,7 @@
                 <a:ea typeface="Arial" pitchFamily="34" charset="-122"/>
                 <a:cs typeface="Arial" pitchFamily="34" charset="-120"/>
               </a:rPr>
-              <a:t>Use after: DQB phase</a:t>
+              <a:t>Use after: Observe phase</a:t>
             </a:r>
             <a:endParaRPr lang="en-US" sz="1100" dirty="0"/>
           </a:p>
@@ -5063,17 +5262,17 @@
               <a:buNone/>
             </a:pPr>
             <a:r>
-              <a:rPr lang="en-US" sz="2000" b="1" dirty="0">
-                <a:solidFill>
-                  <a:srgbClr val="FFFFFF"/>
-                </a:solidFill>
-                <a:latin typeface="Arial" pitchFamily="34" charset="0"/>
-                <a:ea typeface="Arial" pitchFamily="34" charset="-122"/>
-                <a:cs typeface="Arial" pitchFamily="34" charset="-120"/>
-              </a:rPr>
-              <a:t>During the Driving Question Board review, a learner asks: "How do cells use DNA to know which proteins to build?" How should the class sort this question?</a:t>
-            </a:r>
-            <a:endParaRPr lang="en-US" sz="2000" dirty="0"/>
+              <a:rPr lang="en-US" sz="2300" b="1" dirty="0">
+                <a:solidFill>
+                  <a:srgbClr val="FFFFFF"/>
+                </a:solidFill>
+                <a:latin typeface="Arial" pitchFamily="34" charset="0"/>
+                <a:ea typeface="Arial" pitchFamily="34" charset="-122"/>
+                <a:cs typeface="Arial" pitchFamily="34" charset="-120"/>
+              </a:rPr>
+              <a:t>After a meal, some glucose is not needed straight away. What happens to this excess glucose?</a:t>
+            </a:r>
+            <a:endParaRPr lang="en-US" sz="2300" dirty="0"/>
           </a:p>
         </p:txBody>
       </p:sp>
@@ -5171,7 +5370,7 @@
                 <a:ea typeface="Arial" pitchFamily="34" charset="-122"/>
                 <a:cs typeface="Arial" pitchFamily="34" charset="-120"/>
               </a:rPr>
-              <a:t>Not a science question, so it should be removed</a:t>
+              <a:t>It is removed from the body as sugar in urine</a:t>
             </a:r>
             <a:endParaRPr lang="en-US" sz="1700" dirty="0"/>
           </a:p>
@@ -5271,7 +5470,7 @@
                 <a:ea typeface="Arial" pitchFamily="34" charset="-122"/>
                 <a:cs typeface="Arial" pitchFamily="34" charset="-120"/>
               </a:rPr>
-              <a:t>Answered, because githeri contains protein</a:t>
+              <a:t>It is changed to insulin in the pancreas</a:t>
             </a:r>
             <a:endParaRPr lang="en-US" sz="1700" dirty="0"/>
           </a:p>
@@ -5371,7 +5570,7 @@
                 <a:ea typeface="Arial" pitchFamily="34" charset="-122"/>
                 <a:cs typeface="Arial" pitchFamily="34" charset="-120"/>
               </a:rPr>
-              <a:t>New Question Generated, to investigate in a future unit on genetics</a:t>
+              <a:t>It is destroyed in the blood</a:t>
             </a:r>
             <a:endParaRPr lang="en-US" sz="1700" dirty="0"/>
           </a:p>
@@ -5471,7 +5670,7 @@
                 <a:ea typeface="Arial" pitchFamily="34" charset="-122"/>
                 <a:cs typeface="Arial" pitchFamily="34" charset="-120"/>
               </a:rPr>
-              <a:t>Answered, because amino acids explain kwashiorkor</a:t>
+              <a:t>It is stored as glycogen in the liver and muscles</a:t>
             </a:r>
             <a:endParaRPr lang="en-US" sz="1700" dirty="0"/>
           </a:p>
@@ -5581,7 +5780,7 @@
                 <a:ea typeface="Arial" pitchFamily="34" charset="-122"/>
                 <a:cs typeface="Arial" pitchFamily="34" charset="-120"/>
               </a:rPr>
-              <a:t>QUESTION 7 OF 7</a:t>
+              <a:t>QUESTION 7 OF 8</a:t>
             </a:r>
             <a:endParaRPr lang="en-US" sz="1300" dirty="0"/>
           </a:p>
@@ -5642,7 +5841,7 @@
                 <a:ea typeface="Arial" pitchFamily="34" charset="-122"/>
                 <a:cs typeface="Arial" pitchFamily="34" charset="-120"/>
               </a:rPr>
-              <a:t>Use after: Model Building phase</a:t>
+              <a:t>Use after: Explain phase</a:t>
             </a:r>
             <a:endParaRPr lang="en-US" sz="1100" dirty="0"/>
           </a:p>
@@ -5673,17 +5872,17 @@
               <a:buNone/>
             </a:pPr>
             <a:r>
-              <a:rPr lang="en-US" sz="1800" b="1" dirty="0">
-                <a:solidFill>
-                  <a:srgbClr val="FFFFFF"/>
-                </a:solidFill>
-                <a:latin typeface="Arial" pitchFamily="34" charset="0"/>
-                <a:ea typeface="Arial" pitchFamily="34" charset="-122"/>
-                <a:cs typeface="Arial" pitchFamily="34" charset="-120"/>
-              </a:rPr>
-              <a:t>A typical Kenyan daily menu is: breakfast, uji (thin maize porridge) with sugar; lunch, ugali with sukuma wiki; supper, rice with a small piece of fried fish. Which nutritional gap is most likely?</a:t>
-            </a:r>
-            <a:endParaRPr lang="en-US" sz="1800" dirty="0"/>
+              <a:rPr lang="en-US" sz="2000" b="1" dirty="0">
+                <a:solidFill>
+                  <a:srgbClr val="FFFFFF"/>
+                </a:solidFill>
+                <a:latin typeface="Arial" pitchFamily="34" charset="0"/>
+                <a:ea typeface="Arial" pitchFamily="34" charset="-122"/>
+                <a:cs typeface="Arial" pitchFamily="34" charset="-120"/>
+              </a:rPr>
+              <a:t>Learners write a Claim-Evidence-Reasoning explanation of Wanjiru's graph. Which piece of evidence best shows that the glucose in the blood came from digesting the starch in ugali?</a:t>
+            </a:r>
+            <a:endParaRPr lang="en-US" sz="2000" dirty="0"/>
           </a:p>
         </p:txBody>
       </p:sp>
@@ -5773,17 +5972,17 @@
               <a:buNone/>
             </a:pPr>
             <a:r>
-              <a:rPr lang="en-US" sz="1700" dirty="0">
-                <a:solidFill>
-                  <a:srgbClr val="FFFFFF"/>
-                </a:solidFill>
-                <a:latin typeface="Arial" pitchFamily="34" charset="0"/>
-                <a:ea typeface="Arial" pitchFamily="34" charset="-122"/>
-                <a:cs typeface="Arial" pitchFamily="34" charset="-120"/>
-              </a:rPr>
-              <a:t>No carbohydrates, because uji is thin</a:t>
-            </a:r>
-            <a:endParaRPr lang="en-US" sz="1700" dirty="0"/>
+              <a:rPr lang="en-US" sz="1300" dirty="0">
+                <a:solidFill>
+                  <a:srgbClr val="FFFFFF"/>
+                </a:solidFill>
+                <a:latin typeface="Arial" pitchFamily="34" charset="0"/>
+                <a:ea typeface="Arial" pitchFamily="34" charset="-122"/>
+                <a:cs typeface="Arial" pitchFamily="34" charset="-120"/>
+              </a:rPr>
+              <a:t>Her blood glucose fell by 3.5 mmol/L over 120 minutes</a:t>
+            </a:r>
+            <a:endParaRPr lang="en-US" sz="1300" dirty="0"/>
           </a:p>
         </p:txBody>
       </p:sp>
@@ -5873,17 +6072,17 @@
               <a:buNone/>
             </a:pPr>
             <a:r>
-              <a:rPr lang="en-US" sz="1700" dirty="0">
-                <a:solidFill>
-                  <a:srgbClr val="FFFFFF"/>
-                </a:solidFill>
-                <a:latin typeface="Arial" pitchFamily="34" charset="0"/>
-                <a:ea typeface="Arial" pitchFamily="34" charset="-122"/>
-                <a:cs typeface="Arial" pitchFamily="34" charset="-120"/>
-              </a:rPr>
-              <a:t>No lipids, because fried food contains no fats or oils</a:t>
-            </a:r>
-            <a:endParaRPr lang="en-US" sz="1700" dirty="0"/>
+              <a:rPr lang="en-US" sz="1300" dirty="0">
+                <a:solidFill>
+                  <a:srgbClr val="FFFFFF"/>
+                </a:solidFill>
+                <a:latin typeface="Arial" pitchFamily="34" charset="0"/>
+                <a:ea typeface="Arial" pitchFamily="34" charset="-122"/>
+                <a:cs typeface="Arial" pitchFamily="34" charset="-120"/>
+              </a:rPr>
+              <a:t>The normal fasting range of blood glucose is 4.0 to 5.5 mmol/L</a:t>
+            </a:r>
+            <a:endParaRPr lang="en-US" sz="1300" dirty="0"/>
           </a:p>
         </p:txBody>
       </p:sp>
@@ -5973,17 +6172,17 @@
               <a:buNone/>
             </a:pPr>
             <a:r>
-              <a:rPr lang="en-US" sz="1700" dirty="0">
-                <a:solidFill>
-                  <a:srgbClr val="FFFFFF"/>
-                </a:solidFill>
-                <a:latin typeface="Arial" pitchFamily="34" charset="0"/>
-                <a:ea typeface="Arial" pitchFamily="34" charset="-122"/>
-                <a:cs typeface="Arial" pitchFamily="34" charset="-120"/>
-              </a:rPr>
-              <a:t>Insufficient protein, because the only protein source is a small piece of fish</a:t>
-            </a:r>
-            <a:endParaRPr lang="en-US" sz="1700" dirty="0"/>
+              <a:rPr lang="en-US" sz="1300" dirty="0">
+                <a:solidFill>
+                  <a:srgbClr val="FFFFFF"/>
+                </a:solidFill>
+                <a:latin typeface="Arial" pitchFamily="34" charset="0"/>
+                <a:ea typeface="Arial" pitchFamily="34" charset="-122"/>
+                <a:cs typeface="Arial" pitchFamily="34" charset="-120"/>
+              </a:rPr>
+              <a:t>Saliva containing amylase, kept at 37 degrees C with starch, gave a brick-red colour with Benedict's test after 10 minutes</a:t>
+            </a:r>
+            <a:endParaRPr lang="en-US" sz="1300" dirty="0"/>
           </a:p>
         </p:txBody>
       </p:sp>
@@ -6073,17 +6272,17 @@
               <a:buNone/>
             </a:pPr>
             <a:r>
-              <a:rPr lang="en-US" sz="1700" dirty="0">
-                <a:solidFill>
-                  <a:srgbClr val="FFFFFF"/>
-                </a:solidFill>
-                <a:latin typeface="Arial" pitchFamily="34" charset="0"/>
-                <a:ea typeface="Arial" pitchFamily="34" charset="-122"/>
-                <a:cs typeface="Arial" pitchFamily="34" charset="-120"/>
-              </a:rPr>
-              <a:t>Too much protein, because fish is eaten</a:t>
-            </a:r>
-            <a:endParaRPr lang="en-US" sz="1700" dirty="0"/>
+              <a:rPr lang="en-US" sz="1300" dirty="0">
+                <a:solidFill>
+                  <a:srgbClr val="FFFFFF"/>
+                </a:solidFill>
+                <a:latin typeface="Arial" pitchFamily="34" charset="0"/>
+                <a:ea typeface="Arial" pitchFamily="34" charset="-122"/>
+                <a:cs typeface="Arial" pitchFamily="34" charset="-120"/>
+              </a:rPr>
+              <a:t>Sukuma wiki is a green vegetable</a:t>
+            </a:r>
+            <a:endParaRPr lang="en-US" sz="1300" dirty="0"/>
           </a:p>
         </p:txBody>
       </p:sp>
@@ -6140,7 +6339,7 @@
     <p:bg>
       <p:bgPr>
         <a:solidFill>
-          <a:srgbClr val="1F3864"/>
+          <a:srgbClr val="6A4C93"/>
         </a:solidFill>
       </p:bgPr>
     </p:bg>
@@ -6166,73 +6365,573 @@
         </p:nvSpPr>
         <p:spPr>
           <a:xfrm>
-            <a:off x="731520" y="2194560"/>
-            <a:ext cx="10698480" cy="822960"/>
-          </a:xfrm>
-          <a:prstGeom prst="rect">
-            <a:avLst/>
-          </a:prstGeom>
-          <a:noFill/>
-          <a:ln/>
-        </p:spPr>
-        <p:txBody>
-          <a:bodyPr wrap="square" lIns="0" tIns="0" rIns="0" bIns="0" rtlCol="0" anchor="ctr"/>
-          <a:lstStyle/>
-          <a:p>
-            <a:pPr indent="0" marL="0">
-              <a:buNone/>
-            </a:pPr>
-            <a:r>
-              <a:rPr lang="en-US" sz="3400" b="1" dirty="0">
-                <a:solidFill>
-                  <a:srgbClr val="FFFFFF"/>
-                </a:solidFill>
-                <a:latin typeface="Arial" pitchFamily="34" charset="0"/>
-                <a:ea typeface="Arial" pitchFamily="34" charset="-122"/>
-                <a:cs typeface="Arial" pitchFamily="34" charset="-120"/>
-              </a:rPr>
-              <a:t>All done</a:t>
-            </a:r>
-            <a:endParaRPr lang="en-US" sz="3400" dirty="0"/>
-          </a:p>
-        </p:txBody>
-      </p:sp>
-      <p:sp>
-        <p:nvSpPr>
-          <p:cNvPr id="3" name="Text 1"/>
-          <p:cNvSpPr/>
-          <p:nvPr/>
-        </p:nvSpPr>
-        <p:spPr>
-          <a:xfrm>
-            <a:off x="731520" y="3108960"/>
-            <a:ext cx="10698480" cy="731520"/>
-          </a:xfrm>
-          <a:prstGeom prst="rect">
-            <a:avLst/>
-          </a:prstGeom>
-          <a:noFill/>
-          <a:ln/>
-        </p:spPr>
-        <p:txBody>
-          <a:bodyPr wrap="square" lIns="0" tIns="0" rIns="0" bIns="0" rtlCol="0" anchor="ctr"/>
-          <a:lstStyle/>
-          <a:p>
-            <a:pPr indent="0" marL="0">
-              <a:buNone/>
-            </a:pPr>
-            <a:r>
-              <a:rPr lang="en-US" sz="1800" dirty="0">
-                <a:solidFill>
-                  <a:srgbClr val="D9EEF1"/>
-                </a:solidFill>
-                <a:latin typeface="Arial" pitchFamily="34" charset="0"/>
-                <a:ea typeface="Arial" pitchFamily="34" charset="-122"/>
-                <a:cs typeface="Arial" pitchFamily="34" charset="-120"/>
-              </a:rPr>
-              <a:t>Ask your teacher how to submit your answers today (for example, on a paper answer slip).</a:t>
+            <a:off x="548640" y="365760"/>
+            <a:ext cx="6400800" cy="365760"/>
+          </a:xfrm>
+          <a:prstGeom prst="rect">
+            <a:avLst/>
+          </a:prstGeom>
+          <a:noFill/>
+          <a:ln/>
+        </p:spPr>
+        <p:txBody>
+          <a:bodyPr wrap="square" lIns="0" tIns="0" rIns="0" bIns="0" rtlCol="0" anchor="ctr"/>
+          <a:lstStyle/>
+          <a:p>
+            <a:pPr indent="0" marL="0">
+              <a:buNone/>
+            </a:pPr>
+            <a:r>
+              <a:rPr lang="en-US" sz="1300" b="1" spc="200" kern="0" dirty="0">
+                <a:solidFill>
+                  <a:srgbClr val="E0D6F0"/>
+                </a:solidFill>
+                <a:latin typeface="Arial" pitchFamily="34" charset="0"/>
+                <a:ea typeface="Arial" pitchFamily="34" charset="-122"/>
+                <a:cs typeface="Arial" pitchFamily="34" charset="-120"/>
+              </a:rPr>
+              <a:t>QUESTION 8 OF 8</a:t>
+            </a:r>
+            <a:endParaRPr lang="en-US" sz="1300" dirty="0"/>
+          </a:p>
+        </p:txBody>
+      </p:sp>
+      <p:sp>
+        <p:nvSpPr>
+          <p:cNvPr id="3" name="Shape 1"/>
+          <p:cNvSpPr/>
+          <p:nvPr/>
+        </p:nvSpPr>
+        <p:spPr>
+          <a:xfrm>
+            <a:off x="8138160" y="320040"/>
+            <a:ext cx="3474720" cy="365760"/>
+          </a:xfrm>
+          <a:prstGeom prst="roundRect">
+            <a:avLst>
+              <a:gd name="adj" fmla="val 15000"/>
+            </a:avLst>
+          </a:prstGeom>
+          <a:solidFill>
+            <a:srgbClr val="5A3F80"/>
+          </a:solidFill>
+          <a:ln/>
+        </p:spPr>
+      </p:sp>
+      <p:sp>
+        <p:nvSpPr>
+          <p:cNvPr id="4" name="Text 2"/>
+          <p:cNvSpPr/>
+          <p:nvPr/>
+        </p:nvSpPr>
+        <p:spPr>
+          <a:xfrm>
+            <a:off x="8138160" y="320040"/>
+            <a:ext cx="3474720" cy="365760"/>
+          </a:xfrm>
+          <a:prstGeom prst="rect">
+            <a:avLst/>
+          </a:prstGeom>
+          <a:noFill/>
+          <a:ln/>
+        </p:spPr>
+        <p:txBody>
+          <a:bodyPr wrap="square" lIns="0" tIns="0" rIns="0" bIns="0" rtlCol="0" anchor="ctr"/>
+          <a:lstStyle/>
+          <a:p>
+            <a:pPr algn="ctr" indent="0" marL="0">
+              <a:buNone/>
+            </a:pPr>
+            <a:r>
+              <a:rPr lang="en-US" sz="1100" i="1" dirty="0">
+                <a:solidFill>
+                  <a:srgbClr val="E0D6F0"/>
+                </a:solidFill>
+                <a:latin typeface="Arial" pitchFamily="34" charset="0"/>
+                <a:ea typeface="Arial" pitchFamily="34" charset="-122"/>
+                <a:cs typeface="Arial" pitchFamily="34" charset="-120"/>
+              </a:rPr>
+              <a:t>Use after: Model Building phase</a:t>
+            </a:r>
+            <a:endParaRPr lang="en-US" sz="1100" dirty="0"/>
+          </a:p>
+        </p:txBody>
+      </p:sp>
+      <p:sp>
+        <p:nvSpPr>
+          <p:cNvPr id="5" name="Text 3"/>
+          <p:cNvSpPr/>
+          <p:nvPr/>
+        </p:nvSpPr>
+        <p:spPr>
+          <a:xfrm>
+            <a:off x="548640" y="868680"/>
+            <a:ext cx="11064240" cy="1325880"/>
+          </a:xfrm>
+          <a:prstGeom prst="rect">
+            <a:avLst/>
+          </a:prstGeom>
+          <a:noFill/>
+          <a:ln/>
+        </p:spPr>
+        <p:txBody>
+          <a:bodyPr wrap="square" lIns="0" tIns="0" rIns="0" bIns="0" rtlCol="0" anchor="ctr"/>
+          <a:lstStyle/>
+          <a:p>
+            <a:pPr indent="0" marL="0">
+              <a:buNone/>
+            </a:pPr>
+            <a:r>
+              <a:rPr lang="en-US" sz="2300" b="1" dirty="0">
+                <a:solidFill>
+                  <a:srgbClr val="FFFFFF"/>
+                </a:solidFill>
+                <a:latin typeface="Arial" pitchFamily="34" charset="0"/>
+                <a:ea typeface="Arial" pitchFamily="34" charset="-122"/>
+                <a:cs typeface="Arial" pitchFamily="34" charset="-120"/>
+              </a:rPr>
+              <a:t>Which flow diagram shows the correct order of the final model that explains Wanjiru's blood glucose graph?</a:t>
+            </a:r>
+            <a:endParaRPr lang="en-US" sz="2300" dirty="0"/>
+          </a:p>
+        </p:txBody>
+      </p:sp>
+      <p:sp>
+        <p:nvSpPr>
+          <p:cNvPr id="6" name="Shape 4"/>
+          <p:cNvSpPr/>
+          <p:nvPr/>
+        </p:nvSpPr>
+        <p:spPr>
+          <a:xfrm>
+            <a:off x="731520" y="2331720"/>
+            <a:ext cx="10698480" cy="777240"/>
+          </a:xfrm>
+          <a:prstGeom prst="roundRect">
+            <a:avLst>
+              <a:gd name="adj" fmla="val 9412"/>
+            </a:avLst>
+          </a:prstGeom>
+          <a:solidFill>
+            <a:srgbClr val="7C5CAA"/>
+          </a:solidFill>
+          <a:ln/>
+        </p:spPr>
+      </p:sp>
+      <p:sp>
+        <p:nvSpPr>
+          <p:cNvPr id="7" name="Text 5"/>
+          <p:cNvSpPr/>
+          <p:nvPr/>
+        </p:nvSpPr>
+        <p:spPr>
+          <a:xfrm>
+            <a:off x="914400" y="2331720"/>
+            <a:ext cx="548640" cy="777240"/>
+          </a:xfrm>
+          <a:prstGeom prst="rect">
+            <a:avLst/>
+          </a:prstGeom>
+          <a:noFill/>
+          <a:ln/>
+        </p:spPr>
+        <p:txBody>
+          <a:bodyPr wrap="square" lIns="0" tIns="0" rIns="0" bIns="0" rtlCol="0" anchor="ctr"/>
+          <a:lstStyle/>
+          <a:p>
+            <a:pPr indent="0" marL="0">
+              <a:buNone/>
+            </a:pPr>
+            <a:r>
+              <a:rPr lang="en-US" sz="1800" b="1" dirty="0">
+                <a:solidFill>
+                  <a:srgbClr val="FFFFFF"/>
+                </a:solidFill>
+                <a:latin typeface="Arial" pitchFamily="34" charset="0"/>
+                <a:ea typeface="Arial" pitchFamily="34" charset="-122"/>
+                <a:cs typeface="Arial" pitchFamily="34" charset="-120"/>
+              </a:rPr>
+              <a:t>A</a:t>
             </a:r>
             <a:endParaRPr lang="en-US" sz="1800" dirty="0"/>
+          </a:p>
+        </p:txBody>
+      </p:sp>
+      <p:sp>
+        <p:nvSpPr>
+          <p:cNvPr id="8" name="Text 6"/>
+          <p:cNvSpPr/>
+          <p:nvPr/>
+        </p:nvSpPr>
+        <p:spPr>
+          <a:xfrm>
+            <a:off x="1554480" y="2331720"/>
+            <a:ext cx="9692640" cy="777240"/>
+          </a:xfrm>
+          <a:prstGeom prst="rect">
+            <a:avLst/>
+          </a:prstGeom>
+          <a:noFill/>
+          <a:ln/>
+        </p:spPr>
+        <p:txBody>
+          <a:bodyPr wrap="square" lIns="0" tIns="0" rIns="0" bIns="0" rtlCol="0" anchor="ctr"/>
+          <a:lstStyle/>
+          <a:p>
+            <a:pPr indent="0" marL="0">
+              <a:buNone/>
+            </a:pPr>
+            <a:r>
+              <a:rPr lang="en-US" sz="1300" dirty="0">
+                <a:solidFill>
+                  <a:srgbClr val="FFFFFF"/>
+                </a:solidFill>
+                <a:latin typeface="Arial" pitchFamily="34" charset="0"/>
+                <a:ea typeface="Arial" pitchFamily="34" charset="-122"/>
+                <a:cs typeface="Arial" pitchFamily="34" charset="-120"/>
+              </a:rPr>
+              <a:t>Food chemicals, then digestion by enzymes, then glucose in blood, then cells (respiration) and storage, then back to normal</a:t>
+            </a:r>
+            <a:endParaRPr lang="en-US" sz="1300" dirty="0"/>
+          </a:p>
+        </p:txBody>
+      </p:sp>
+      <p:sp>
+        <p:nvSpPr>
+          <p:cNvPr id="9" name="Shape 7"/>
+          <p:cNvSpPr/>
+          <p:nvPr/>
+        </p:nvSpPr>
+        <p:spPr>
+          <a:xfrm>
+            <a:off x="731520" y="3246120"/>
+            <a:ext cx="10698480" cy="777240"/>
+          </a:xfrm>
+          <a:prstGeom prst="roundRect">
+            <a:avLst>
+              <a:gd name="adj" fmla="val 9412"/>
+            </a:avLst>
+          </a:prstGeom>
+          <a:solidFill>
+            <a:srgbClr val="7C5CAA"/>
+          </a:solidFill>
+          <a:ln/>
+        </p:spPr>
+      </p:sp>
+      <p:sp>
+        <p:nvSpPr>
+          <p:cNvPr id="10" name="Text 8"/>
+          <p:cNvSpPr/>
+          <p:nvPr/>
+        </p:nvSpPr>
+        <p:spPr>
+          <a:xfrm>
+            <a:off x="914400" y="3246120"/>
+            <a:ext cx="548640" cy="777240"/>
+          </a:xfrm>
+          <a:prstGeom prst="rect">
+            <a:avLst/>
+          </a:prstGeom>
+          <a:noFill/>
+          <a:ln/>
+        </p:spPr>
+        <p:txBody>
+          <a:bodyPr wrap="square" lIns="0" tIns="0" rIns="0" bIns="0" rtlCol="0" anchor="ctr"/>
+          <a:lstStyle/>
+          <a:p>
+            <a:pPr indent="0" marL="0">
+              <a:buNone/>
+            </a:pPr>
+            <a:r>
+              <a:rPr lang="en-US" sz="1800" b="1" dirty="0">
+                <a:solidFill>
+                  <a:srgbClr val="FFFFFF"/>
+                </a:solidFill>
+                <a:latin typeface="Arial" pitchFamily="34" charset="0"/>
+                <a:ea typeface="Arial" pitchFamily="34" charset="-122"/>
+                <a:cs typeface="Arial" pitchFamily="34" charset="-120"/>
+              </a:rPr>
+              <a:t>B</a:t>
+            </a:r>
+            <a:endParaRPr lang="en-US" sz="1800" dirty="0"/>
+          </a:p>
+        </p:txBody>
+      </p:sp>
+      <p:sp>
+        <p:nvSpPr>
+          <p:cNvPr id="11" name="Text 9"/>
+          <p:cNvSpPr/>
+          <p:nvPr/>
+        </p:nvSpPr>
+        <p:spPr>
+          <a:xfrm>
+            <a:off x="1554480" y="3246120"/>
+            <a:ext cx="9692640" cy="777240"/>
+          </a:xfrm>
+          <a:prstGeom prst="rect">
+            <a:avLst/>
+          </a:prstGeom>
+          <a:noFill/>
+          <a:ln/>
+        </p:spPr>
+        <p:txBody>
+          <a:bodyPr wrap="square" lIns="0" tIns="0" rIns="0" bIns="0" rtlCol="0" anchor="ctr"/>
+          <a:lstStyle/>
+          <a:p>
+            <a:pPr indent="0" marL="0">
+              <a:buNone/>
+            </a:pPr>
+            <a:r>
+              <a:rPr lang="en-US" sz="1300" dirty="0">
+                <a:solidFill>
+                  <a:srgbClr val="FFFFFF"/>
+                </a:solidFill>
+                <a:latin typeface="Arial" pitchFamily="34" charset="0"/>
+                <a:ea typeface="Arial" pitchFamily="34" charset="-122"/>
+                <a:cs typeface="Arial" pitchFamily="34" charset="-120"/>
+              </a:rPr>
+              <a:t>Food chemicals, then glucose in blood, then digestion by enzymes, then cells and storage, then back to normal</a:t>
+            </a:r>
+            <a:endParaRPr lang="en-US" sz="1300" dirty="0"/>
+          </a:p>
+        </p:txBody>
+      </p:sp>
+      <p:sp>
+        <p:nvSpPr>
+          <p:cNvPr id="12" name="Shape 10"/>
+          <p:cNvSpPr/>
+          <p:nvPr/>
+        </p:nvSpPr>
+        <p:spPr>
+          <a:xfrm>
+            <a:off x="731520" y="4160520"/>
+            <a:ext cx="10698480" cy="777240"/>
+          </a:xfrm>
+          <a:prstGeom prst="roundRect">
+            <a:avLst>
+              <a:gd name="adj" fmla="val 9412"/>
+            </a:avLst>
+          </a:prstGeom>
+          <a:solidFill>
+            <a:srgbClr val="7C5CAA"/>
+          </a:solidFill>
+          <a:ln/>
+        </p:spPr>
+      </p:sp>
+      <p:sp>
+        <p:nvSpPr>
+          <p:cNvPr id="13" name="Text 11"/>
+          <p:cNvSpPr/>
+          <p:nvPr/>
+        </p:nvSpPr>
+        <p:spPr>
+          <a:xfrm>
+            <a:off x="914400" y="4160520"/>
+            <a:ext cx="548640" cy="777240"/>
+          </a:xfrm>
+          <a:prstGeom prst="rect">
+            <a:avLst/>
+          </a:prstGeom>
+          <a:noFill/>
+          <a:ln/>
+        </p:spPr>
+        <p:txBody>
+          <a:bodyPr wrap="square" lIns="0" tIns="0" rIns="0" bIns="0" rtlCol="0" anchor="ctr"/>
+          <a:lstStyle/>
+          <a:p>
+            <a:pPr indent="0" marL="0">
+              <a:buNone/>
+            </a:pPr>
+            <a:r>
+              <a:rPr lang="en-US" sz="1800" b="1" dirty="0">
+                <a:solidFill>
+                  <a:srgbClr val="FFFFFF"/>
+                </a:solidFill>
+                <a:latin typeface="Arial" pitchFamily="34" charset="0"/>
+                <a:ea typeface="Arial" pitchFamily="34" charset="-122"/>
+                <a:cs typeface="Arial" pitchFamily="34" charset="-120"/>
+              </a:rPr>
+              <a:t>C</a:t>
+            </a:r>
+            <a:endParaRPr lang="en-US" sz="1800" dirty="0"/>
+          </a:p>
+        </p:txBody>
+      </p:sp>
+      <p:sp>
+        <p:nvSpPr>
+          <p:cNvPr id="14" name="Text 12"/>
+          <p:cNvSpPr/>
+          <p:nvPr/>
+        </p:nvSpPr>
+        <p:spPr>
+          <a:xfrm>
+            <a:off x="1554480" y="4160520"/>
+            <a:ext cx="9692640" cy="777240"/>
+          </a:xfrm>
+          <a:prstGeom prst="rect">
+            <a:avLst/>
+          </a:prstGeom>
+          <a:noFill/>
+          <a:ln/>
+        </p:spPr>
+        <p:txBody>
+          <a:bodyPr wrap="square" lIns="0" tIns="0" rIns="0" bIns="0" rtlCol="0" anchor="ctr"/>
+          <a:lstStyle/>
+          <a:p>
+            <a:pPr indent="0" marL="0">
+              <a:buNone/>
+            </a:pPr>
+            <a:r>
+              <a:rPr lang="en-US" sz="1300" dirty="0">
+                <a:solidFill>
+                  <a:srgbClr val="FFFFFF"/>
+                </a:solidFill>
+                <a:latin typeface="Arial" pitchFamily="34" charset="0"/>
+                <a:ea typeface="Arial" pitchFamily="34" charset="-122"/>
+                <a:cs typeface="Arial" pitchFamily="34" charset="-120"/>
+              </a:rPr>
+              <a:t>Digestion by enzymes, then food chemicals, then glucose in blood, then back to normal, then cells and storage</a:t>
+            </a:r>
+            <a:endParaRPr lang="en-US" sz="1300" dirty="0"/>
+          </a:p>
+        </p:txBody>
+      </p:sp>
+      <p:sp>
+        <p:nvSpPr>
+          <p:cNvPr id="15" name="Shape 13"/>
+          <p:cNvSpPr/>
+          <p:nvPr/>
+        </p:nvSpPr>
+        <p:spPr>
+          <a:xfrm>
+            <a:off x="731520" y="5074920"/>
+            <a:ext cx="10698480" cy="777240"/>
+          </a:xfrm>
+          <a:prstGeom prst="roundRect">
+            <a:avLst>
+              <a:gd name="adj" fmla="val 9412"/>
+            </a:avLst>
+          </a:prstGeom>
+          <a:solidFill>
+            <a:srgbClr val="7C5CAA"/>
+          </a:solidFill>
+          <a:ln/>
+        </p:spPr>
+      </p:sp>
+      <p:sp>
+        <p:nvSpPr>
+          <p:cNvPr id="16" name="Text 14"/>
+          <p:cNvSpPr/>
+          <p:nvPr/>
+        </p:nvSpPr>
+        <p:spPr>
+          <a:xfrm>
+            <a:off x="914400" y="5074920"/>
+            <a:ext cx="548640" cy="777240"/>
+          </a:xfrm>
+          <a:prstGeom prst="rect">
+            <a:avLst/>
+          </a:prstGeom>
+          <a:noFill/>
+          <a:ln/>
+        </p:spPr>
+        <p:txBody>
+          <a:bodyPr wrap="square" lIns="0" tIns="0" rIns="0" bIns="0" rtlCol="0" anchor="ctr"/>
+          <a:lstStyle/>
+          <a:p>
+            <a:pPr indent="0" marL="0">
+              <a:buNone/>
+            </a:pPr>
+            <a:r>
+              <a:rPr lang="en-US" sz="1800" b="1" dirty="0">
+                <a:solidFill>
+                  <a:srgbClr val="FFFFFF"/>
+                </a:solidFill>
+                <a:latin typeface="Arial" pitchFamily="34" charset="0"/>
+                <a:ea typeface="Arial" pitchFamily="34" charset="-122"/>
+                <a:cs typeface="Arial" pitchFamily="34" charset="-120"/>
+              </a:rPr>
+              <a:t>D</a:t>
+            </a:r>
+            <a:endParaRPr lang="en-US" sz="1800" dirty="0"/>
+          </a:p>
+        </p:txBody>
+      </p:sp>
+      <p:sp>
+        <p:nvSpPr>
+          <p:cNvPr id="17" name="Text 15"/>
+          <p:cNvSpPr/>
+          <p:nvPr/>
+        </p:nvSpPr>
+        <p:spPr>
+          <a:xfrm>
+            <a:off x="1554480" y="5074920"/>
+            <a:ext cx="9692640" cy="777240"/>
+          </a:xfrm>
+          <a:prstGeom prst="rect">
+            <a:avLst/>
+          </a:prstGeom>
+          <a:noFill/>
+          <a:ln/>
+        </p:spPr>
+        <p:txBody>
+          <a:bodyPr wrap="square" lIns="0" tIns="0" rIns="0" bIns="0" rtlCol="0" anchor="ctr"/>
+          <a:lstStyle/>
+          <a:p>
+            <a:pPr indent="0" marL="0">
+              <a:buNone/>
+            </a:pPr>
+            <a:r>
+              <a:rPr lang="en-US" sz="1300" dirty="0">
+                <a:solidFill>
+                  <a:srgbClr val="FFFFFF"/>
+                </a:solidFill>
+                <a:latin typeface="Arial" pitchFamily="34" charset="0"/>
+                <a:ea typeface="Arial" pitchFamily="34" charset="-122"/>
+                <a:cs typeface="Arial" pitchFamily="34" charset="-120"/>
+              </a:rPr>
+              <a:t>Food chemicals, then cells and storage, then digestion by enzymes, then glucose in blood, then back to normal</a:t>
+            </a:r>
+            <a:endParaRPr lang="en-US" sz="1300" dirty="0"/>
+          </a:p>
+        </p:txBody>
+      </p:sp>
+      <p:sp>
+        <p:nvSpPr>
+          <p:cNvPr id="18" name="Text 16"/>
+          <p:cNvSpPr/>
+          <p:nvPr/>
+        </p:nvSpPr>
+        <p:spPr>
+          <a:xfrm>
+            <a:off x="11521440" y="6446520"/>
+            <a:ext cx="457200" cy="274320"/>
+          </a:xfrm>
+          <a:prstGeom prst="rect">
+            <a:avLst/>
+          </a:prstGeom>
+          <a:noFill/>
+          <a:ln/>
+        </p:spPr>
+        <p:txBody>
+          <a:bodyPr wrap="square" lIns="0" tIns="0" rIns="0" bIns="0" rtlCol="0" anchor="ctr"/>
+          <a:lstStyle/>
+          <a:p>
+            <a:pPr algn="r" indent="0" marL="0">
+              <a:buNone/>
+            </a:pPr>
+            <a:r>
+              <a:rPr lang="en-US" sz="1000" dirty="0">
+                <a:solidFill>
+                  <a:srgbClr val="C9B8E0"/>
+                </a:solidFill>
+                <a:latin typeface="Arial" pitchFamily="34" charset="0"/>
+                <a:ea typeface="Arial" pitchFamily="34" charset="-122"/>
+                <a:cs typeface="Arial" pitchFamily="34" charset="-120"/>
+              </a:rPr>
+              <a:t>9</a:t>
+            </a:r>
+            <a:endParaRPr lang="en-US" sz="1000" dirty="0"/>
           </a:p>
         </p:txBody>
       </p:sp>
